--- a/mermaid/agentic-sdd/agentic-sdd-圖表合輯.pptx
+++ b/mermaid/agentic-sdd/agentic-sdd-圖表合輯.pptx
@@ -10,6 +10,7 @@
     <p:sldId id="258" r:id="rId9"/>
     <p:sldId id="259" r:id="rId10"/>
     <p:sldId id="260" r:id="rId11"/>
+    <p:sldId id="261" r:id="rId12"/>
   </p:sldIdLst>
   <p:sldSz cx="12191695" cy="6858000" type="screen4x3"/>
   <p:notesSz cx="6858000" cy="9144000"/>
@@ -3478,6 +3479,88 @@
           <a:xfrm>
             <a:off x="2660982" y="914399"/>
             <a:ext cx="6869730" cy="5669280"/>
+          </a:xfrm>
+          <a:prstGeom prst="rect">
+            <a:avLst/>
+          </a:prstGeom>
+        </p:spPr>
+      </p:pic>
+    </p:spTree>
+  </p:cSld>
+  <p:clrMapOvr>
+    <a:masterClrMapping/>
+  </p:clrMapOvr>
+</p:sld>
+</file>
+
+<file path=ppt/slides/slide6.xml><?xml version="1.0" encoding="utf-8"?>
+<p:sld xmlns:a="http://schemas.openxmlformats.org/drawingml/2006/main" xmlns:p="http://schemas.openxmlformats.org/presentationml/2006/main" xmlns:r="http://schemas.openxmlformats.org/officeDocument/2006/relationships">
+  <p:cSld>
+    <p:spTree>
+      <p:nvGrpSpPr>
+        <p:cNvPr id="1" name=""/>
+        <p:cNvGrpSpPr/>
+        <p:nvPr/>
+      </p:nvGrpSpPr>
+      <p:grpSpPr/>
+      <p:sp>
+        <p:nvSpPr>
+          <p:cNvPr id="2" name="TextBox 1"/>
+          <p:cNvSpPr txBox="1"/>
+          <p:nvPr/>
+        </p:nvSpPr>
+        <p:spPr>
+          <a:xfrm>
+            <a:off x="457200" y="182880"/>
+            <a:ext cx="11277295" cy="640080"/>
+          </a:xfrm>
+          <a:prstGeom prst="rect">
+            <a:avLst/>
+          </a:prstGeom>
+          <a:noFill/>
+        </p:spPr>
+        <p:txBody>
+          <a:bodyPr wrap="square" anchor="ctr">
+            <a:spAutoFit/>
+          </a:bodyPr>
+          <a:lstStyle/>
+          <a:p>
+            <a:pPr algn="ctr">
+              <a:defRPr sz="2600" b="1">
+                <a:solidFill>
+                  <a:srgbClr val="333333"/>
+                </a:solidFill>
+              </a:defRPr>
+            </a:pPr>
+            <a:r>
+              <a:rPr sz="2600" b="1">
+                <a:solidFill>
+                  <a:srgbClr val="333333"/>
+                </a:solidFill>
+              </a:rPr>
+              <a:t>6. 概念對映</a:t>
+            </a:r>
+          </a:p>
+        </p:txBody>
+      </p:sp>
+      <p:pic>
+        <p:nvPicPr>
+          <p:cNvPr id="3" name="Picture 2" descr="6-概念對映.png"/>
+          <p:cNvPicPr>
+            <a:picLocks noChangeAspect="1"/>
+          </p:cNvPicPr>
+          <p:nvPr/>
+        </p:nvPicPr>
+        <p:blipFill>
+          <a:blip r:embed="rId2"/>
+          <a:stretch>
+            <a:fillRect/>
+          </a:stretch>
+        </p:blipFill>
+        <p:spPr>
+          <a:xfrm>
+            <a:off x="4497593" y="914399"/>
+            <a:ext cx="3196508" cy="5669280"/>
           </a:xfrm>
           <a:prstGeom prst="rect">
             <a:avLst/>
